--- a/Lectures/Chunk 7 - Imports.pptx
+++ b/Lectures/Chunk 7 - Imports.pptx
@@ -133,99 +133,6 @@
 <file path=ppt/changesInfos/changesInfo1.xml><?xml version="1.0" encoding="utf-8"?>
 <pc:chgInfo xmlns:a="http://schemas.openxmlformats.org/drawingml/2006/main" xmlns:r="http://schemas.openxmlformats.org/officeDocument/2006/relationships" xmlns:ac="http://schemas.microsoft.com/office/drawing/2013/main/command" xmlns:pc="http://schemas.microsoft.com/office/powerpoint/2013/main/command">
   <pc:docChgLst>
-    <pc:chgData name="Jonathan Bollig" userId="8b5d0afe-f106-45e0-8c3f-fd98fa124db1" providerId="ADAL" clId="{891409C9-2319-433B-8001-2E1CE368518E}"/>
-    <pc:docChg chg="custSel addSld delSld modSld">
-      <pc:chgData name="Jonathan Bollig" userId="8b5d0afe-f106-45e0-8c3f-fd98fa124db1" providerId="ADAL" clId="{891409C9-2319-433B-8001-2E1CE368518E}" dt="2025-08-18T13:33:56.347" v="46" actId="47"/>
-      <pc:docMkLst>
-        <pc:docMk/>
-      </pc:docMkLst>
-      <pc:sldChg chg="modSp mod">
-        <pc:chgData name="Jonathan Bollig" userId="8b5d0afe-f106-45e0-8c3f-fd98fa124db1" providerId="ADAL" clId="{891409C9-2319-433B-8001-2E1CE368518E}" dt="2025-08-18T10:03:07.320" v="7" actId="20577"/>
-        <pc:sldMkLst>
-          <pc:docMk/>
-          <pc:sldMk cId="836289018" sldId="256"/>
-        </pc:sldMkLst>
-      </pc:sldChg>
-      <pc:sldChg chg="del">
-        <pc:chgData name="Jonathan Bollig" userId="8b5d0afe-f106-45e0-8c3f-fd98fa124db1" providerId="ADAL" clId="{891409C9-2319-433B-8001-2E1CE368518E}" dt="2025-08-18T09:57:07.527" v="0" actId="47"/>
-        <pc:sldMkLst>
-          <pc:docMk/>
-          <pc:sldMk cId="3656329933" sldId="257"/>
-        </pc:sldMkLst>
-      </pc:sldChg>
-      <pc:sldChg chg="del">
-        <pc:chgData name="Jonathan Bollig" userId="8b5d0afe-f106-45e0-8c3f-fd98fa124db1" providerId="ADAL" clId="{891409C9-2319-433B-8001-2E1CE368518E}" dt="2025-08-18T09:57:07.527" v="0" actId="47"/>
-        <pc:sldMkLst>
-          <pc:docMk/>
-          <pc:sldMk cId="544279955" sldId="258"/>
-        </pc:sldMkLst>
-      </pc:sldChg>
-      <pc:sldChg chg="delSp modSp del mod">
-        <pc:chgData name="Jonathan Bollig" userId="8b5d0afe-f106-45e0-8c3f-fd98fa124db1" providerId="ADAL" clId="{891409C9-2319-433B-8001-2E1CE368518E}" dt="2025-08-18T13:33:56.347" v="46" actId="47"/>
-        <pc:sldMkLst>
-          <pc:docMk/>
-          <pc:sldMk cId="2169503629" sldId="259"/>
-        </pc:sldMkLst>
-      </pc:sldChg>
-      <pc:sldChg chg="add">
-        <pc:chgData name="Jonathan Bollig" userId="8b5d0afe-f106-45e0-8c3f-fd98fa124db1" providerId="ADAL" clId="{891409C9-2319-433B-8001-2E1CE368518E}" dt="2025-08-18T13:33:54.473" v="45"/>
-        <pc:sldMkLst>
-          <pc:docMk/>
-          <pc:sldMk cId="932306145" sldId="260"/>
-        </pc:sldMkLst>
-      </pc:sldChg>
-      <pc:sldChg chg="del">
-        <pc:chgData name="Jonathan Bollig" userId="8b5d0afe-f106-45e0-8c3f-fd98fa124db1" providerId="ADAL" clId="{891409C9-2319-433B-8001-2E1CE368518E}" dt="2025-08-18T09:57:07.527" v="0" actId="47"/>
-        <pc:sldMkLst>
-          <pc:docMk/>
-          <pc:sldMk cId="2533283895" sldId="260"/>
-        </pc:sldMkLst>
-      </pc:sldChg>
-      <pc:sldChg chg="del">
-        <pc:chgData name="Jonathan Bollig" userId="8b5d0afe-f106-45e0-8c3f-fd98fa124db1" providerId="ADAL" clId="{891409C9-2319-433B-8001-2E1CE368518E}" dt="2025-08-18T09:57:07.527" v="0" actId="47"/>
-        <pc:sldMkLst>
-          <pc:docMk/>
-          <pc:sldMk cId="847849653" sldId="261"/>
-        </pc:sldMkLst>
-      </pc:sldChg>
-      <pc:sldChg chg="del">
-        <pc:chgData name="Jonathan Bollig" userId="8b5d0afe-f106-45e0-8c3f-fd98fa124db1" providerId="ADAL" clId="{891409C9-2319-433B-8001-2E1CE368518E}" dt="2025-08-18T09:57:07.527" v="0" actId="47"/>
-        <pc:sldMkLst>
-          <pc:docMk/>
-          <pc:sldMk cId="1908144578" sldId="262"/>
-        </pc:sldMkLst>
-      </pc:sldChg>
-      <pc:sldChg chg="del">
-        <pc:chgData name="Jonathan Bollig" userId="8b5d0afe-f106-45e0-8c3f-fd98fa124db1" providerId="ADAL" clId="{891409C9-2319-433B-8001-2E1CE368518E}" dt="2025-08-18T09:57:07.527" v="0" actId="47"/>
-        <pc:sldMkLst>
-          <pc:docMk/>
-          <pc:sldMk cId="4076698392" sldId="263"/>
-        </pc:sldMkLst>
-      </pc:sldChg>
-      <pc:sldChg chg="del">
-        <pc:chgData name="Jonathan Bollig" userId="8b5d0afe-f106-45e0-8c3f-fd98fa124db1" providerId="ADAL" clId="{891409C9-2319-433B-8001-2E1CE368518E}" dt="2025-08-18T09:57:07.527" v="0" actId="47"/>
-        <pc:sldMkLst>
-          <pc:docMk/>
-          <pc:sldMk cId="3708449378" sldId="264"/>
-        </pc:sldMkLst>
-      </pc:sldChg>
-      <pc:sldChg chg="del">
-        <pc:chgData name="Jonathan Bollig" userId="8b5d0afe-f106-45e0-8c3f-fd98fa124db1" providerId="ADAL" clId="{891409C9-2319-433B-8001-2E1CE368518E}" dt="2025-08-18T09:57:07.527" v="0" actId="47"/>
-        <pc:sldMkLst>
-          <pc:docMk/>
-          <pc:sldMk cId="933916611" sldId="265"/>
-        </pc:sldMkLst>
-      </pc:sldChg>
-      <pc:sldChg chg="del">
-        <pc:chgData name="Jonathan Bollig" userId="8b5d0afe-f106-45e0-8c3f-fd98fa124db1" providerId="ADAL" clId="{891409C9-2319-433B-8001-2E1CE368518E}" dt="2025-08-18T09:57:07.527" v="0" actId="47"/>
-        <pc:sldMkLst>
-          <pc:docMk/>
-          <pc:sldMk cId="2117799034" sldId="266"/>
-        </pc:sldMkLst>
-      </pc:sldChg>
-    </pc:docChg>
-  </pc:docChgLst>
-  <pc:docChgLst>
     <pc:chgData name="Jonathan Bollig" userId="8b5d0afe-f106-45e0-8c3f-fd98fa124db1" providerId="ADAL" clId="{B108959E-8160-4214-BA0D-42D2F1070C03}"/>
     <pc:docChg chg="undo custSel addSld modSld sldOrd">
       <pc:chgData name="Jonathan Bollig" userId="8b5d0afe-f106-45e0-8c3f-fd98fa124db1" providerId="ADAL" clId="{B108959E-8160-4214-BA0D-42D2F1070C03}" dt="2025-08-18T09:38:51.161" v="3588" actId="20577"/>
@@ -314,12 +221,12 @@
   <pc:docChgLst>
     <pc:chgData name="Jonathan Bollig" userId="8b5d0afe-f106-45e0-8c3f-fd98fa124db1" providerId="ADAL" clId="{B2469FA9-EBD8-4834-A16D-CBF8EFC907DD}"/>
     <pc:docChg chg="undo custSel addSld delSld modSld">
-      <pc:chgData name="Jonathan Bollig" userId="8b5d0afe-f106-45e0-8c3f-fd98fa124db1" providerId="ADAL" clId="{B2469FA9-EBD8-4834-A16D-CBF8EFC907DD}" dt="2025-10-04T14:11:15.102" v="1650" actId="20577"/>
+      <pc:chgData name="Jonathan Bollig" userId="8b5d0afe-f106-45e0-8c3f-fd98fa124db1" providerId="ADAL" clId="{B2469FA9-EBD8-4834-A16D-CBF8EFC907DD}" dt="2025-10-07T00:02:32.428" v="1652" actId="20577"/>
       <pc:docMkLst>
         <pc:docMk/>
       </pc:docMkLst>
       <pc:sldChg chg="modSp mod">
-        <pc:chgData name="Jonathan Bollig" userId="8b5d0afe-f106-45e0-8c3f-fd98fa124db1" providerId="ADAL" clId="{B2469FA9-EBD8-4834-A16D-CBF8EFC907DD}" dt="2025-10-04T14:11:15.102" v="1650" actId="20577"/>
+        <pc:chgData name="Jonathan Bollig" userId="8b5d0afe-f106-45e0-8c3f-fd98fa124db1" providerId="ADAL" clId="{B2469FA9-EBD8-4834-A16D-CBF8EFC907DD}" dt="2025-10-07T00:02:32.428" v="1652" actId="20577"/>
         <pc:sldMkLst>
           <pc:docMk/>
           <pc:sldMk cId="836289018" sldId="256"/>
@@ -330,6 +237,14 @@
             <pc:docMk/>
             <pc:sldMk cId="836289018" sldId="256"/>
             <ac:spMk id="2" creationId="{40F72F59-52B3-6063-A2E3-2AA45125A99B}"/>
+          </ac:spMkLst>
+        </pc:spChg>
+        <pc:spChg chg="mod">
+          <ac:chgData name="Jonathan Bollig" userId="8b5d0afe-f106-45e0-8c3f-fd98fa124db1" providerId="ADAL" clId="{B2469FA9-EBD8-4834-A16D-CBF8EFC907DD}" dt="2025-10-07T00:02:32.428" v="1652" actId="20577"/>
+          <ac:spMkLst>
+            <pc:docMk/>
+            <pc:sldMk cId="836289018" sldId="256"/>
+            <ac:spMk id="3" creationId="{62F76653-44B5-8707-B179-FDB90CB514B7}"/>
           </ac:spMkLst>
         </pc:spChg>
       </pc:sldChg>
@@ -453,14 +368,6 @@
             <ac:spMk id="3" creationId="{DC7C3A44-C349-DDDE-C17F-EA28DC153A6C}"/>
           </ac:spMkLst>
         </pc:spChg>
-        <pc:picChg chg="add del mod">
-          <ac:chgData name="Jonathan Bollig" userId="8b5d0afe-f106-45e0-8c3f-fd98fa124db1" providerId="ADAL" clId="{B2469FA9-EBD8-4834-A16D-CBF8EFC907DD}" dt="2025-10-04T11:33:20.140" v="331" actId="478"/>
-          <ac:picMkLst>
-            <pc:docMk/>
-            <pc:sldMk cId="1004629392" sldId="271"/>
-            <ac:picMk id="5" creationId="{387B5230-DE62-2913-F63B-D12B8CE69F55}"/>
-          </ac:picMkLst>
-        </pc:picChg>
         <pc:picChg chg="add mod">
           <ac:chgData name="Jonathan Bollig" userId="8b5d0afe-f106-45e0-8c3f-fd98fa124db1" providerId="ADAL" clId="{B2469FA9-EBD8-4834-A16D-CBF8EFC907DD}" dt="2025-10-04T11:42:56.586" v="454" actId="1076"/>
           <ac:picMkLst>
@@ -516,38 +423,6 @@
             <ac:spMk id="3" creationId="{28B637FA-DF60-C592-FD5B-49C7FCF53C58}"/>
           </ac:spMkLst>
         </pc:spChg>
-        <pc:spChg chg="add del mod">
-          <ac:chgData name="Jonathan Bollig" userId="8b5d0afe-f106-45e0-8c3f-fd98fa124db1" providerId="ADAL" clId="{B2469FA9-EBD8-4834-A16D-CBF8EFC907DD}" dt="2025-10-04T13:42:46.002" v="720" actId="21"/>
-          <ac:spMkLst>
-            <pc:docMk/>
-            <pc:sldMk cId="3860615279" sldId="272"/>
-            <ac:spMk id="6" creationId="{E88508F4-8480-A42A-7D63-5D6E9C4E6E40}"/>
-          </ac:spMkLst>
-        </pc:spChg>
-        <pc:spChg chg="add del mod">
-          <ac:chgData name="Jonathan Bollig" userId="8b5d0afe-f106-45e0-8c3f-fd98fa124db1" providerId="ADAL" clId="{B2469FA9-EBD8-4834-A16D-CBF8EFC907DD}" dt="2025-10-04T13:42:46.002" v="720" actId="21"/>
-          <ac:spMkLst>
-            <pc:docMk/>
-            <pc:sldMk cId="3860615279" sldId="272"/>
-            <ac:spMk id="7" creationId="{C84FBA27-B470-C83D-78C2-44F3DD78A8AD}"/>
-          </ac:spMkLst>
-        </pc:spChg>
-        <pc:picChg chg="add del mod">
-          <ac:chgData name="Jonathan Bollig" userId="8b5d0afe-f106-45e0-8c3f-fd98fa124db1" providerId="ADAL" clId="{B2469FA9-EBD8-4834-A16D-CBF8EFC907DD}" dt="2025-10-04T13:42:46.002" v="720" actId="21"/>
-          <ac:picMkLst>
-            <pc:docMk/>
-            <pc:sldMk cId="3860615279" sldId="272"/>
-            <ac:picMk id="5" creationId="{E8716AC8-EB9D-C401-D3F8-1B511A3374AA}"/>
-          </ac:picMkLst>
-        </pc:picChg>
-        <pc:picChg chg="add del mod">
-          <ac:chgData name="Jonathan Bollig" userId="8b5d0afe-f106-45e0-8c3f-fd98fa124db1" providerId="ADAL" clId="{B2469FA9-EBD8-4834-A16D-CBF8EFC907DD}" dt="2025-10-04T14:01:29.873" v="1564" actId="478"/>
-          <ac:picMkLst>
-            <pc:docMk/>
-            <pc:sldMk cId="3860615279" sldId="272"/>
-            <ac:picMk id="13" creationId="{A4027BD1-6765-D06B-AC57-98A2006B3EA2}"/>
-          </ac:picMkLst>
-        </pc:picChg>
         <pc:picChg chg="add mod">
           <ac:chgData name="Jonathan Bollig" userId="8b5d0afe-f106-45e0-8c3f-fd98fa124db1" providerId="ADAL" clId="{B2469FA9-EBD8-4834-A16D-CBF8EFC907DD}" dt="2025-10-04T14:01:40.159" v="1572" actId="1440"/>
           <ac:picMkLst>
@@ -556,38 +431,6 @@
             <ac:picMk id="18" creationId="{FC1D2D51-7901-6192-AF24-B792BC561D4F}"/>
           </ac:picMkLst>
         </pc:picChg>
-        <pc:inkChg chg="add del">
-          <ac:chgData name="Jonathan Bollig" userId="8b5d0afe-f106-45e0-8c3f-fd98fa124db1" providerId="ADAL" clId="{B2469FA9-EBD8-4834-A16D-CBF8EFC907DD}" dt="2025-10-04T14:01:30.873" v="1565" actId="478"/>
-          <ac:inkMkLst>
-            <pc:docMk/>
-            <pc:sldMk cId="3860615279" sldId="272"/>
-            <ac:inkMk id="14" creationId="{3188743A-251F-990E-C365-3EFA3FC9B49E}"/>
-          </ac:inkMkLst>
-        </pc:inkChg>
-        <pc:inkChg chg="add del">
-          <ac:chgData name="Jonathan Bollig" userId="8b5d0afe-f106-45e0-8c3f-fd98fa124db1" providerId="ADAL" clId="{B2469FA9-EBD8-4834-A16D-CBF8EFC907DD}" dt="2025-10-04T14:01:31.492" v="1566" actId="478"/>
-          <ac:inkMkLst>
-            <pc:docMk/>
-            <pc:sldMk cId="3860615279" sldId="272"/>
-            <ac:inkMk id="15" creationId="{007284F8-69F0-B9F9-EAAF-6D41EAB1A024}"/>
-          </ac:inkMkLst>
-        </pc:inkChg>
-        <pc:inkChg chg="add del">
-          <ac:chgData name="Jonathan Bollig" userId="8b5d0afe-f106-45e0-8c3f-fd98fa124db1" providerId="ADAL" clId="{B2469FA9-EBD8-4834-A16D-CBF8EFC907DD}" dt="2025-10-04T14:01:32.493" v="1567" actId="478"/>
-          <ac:inkMkLst>
-            <pc:docMk/>
-            <pc:sldMk cId="3860615279" sldId="272"/>
-            <ac:inkMk id="16" creationId="{5F80351D-DABD-2135-33C5-2ED0F0CBB8D9}"/>
-          </ac:inkMkLst>
-        </pc:inkChg>
-        <pc:cxnChg chg="add del mod">
-          <ac:chgData name="Jonathan Bollig" userId="8b5d0afe-f106-45e0-8c3f-fd98fa124db1" providerId="ADAL" clId="{B2469FA9-EBD8-4834-A16D-CBF8EFC907DD}" dt="2025-10-04T13:42:46.002" v="720" actId="21"/>
-          <ac:cxnSpMkLst>
-            <pc:docMk/>
-            <pc:sldMk cId="3860615279" sldId="272"/>
-            <ac:cxnSpMk id="8" creationId="{633DC312-18DF-BE34-D7A8-DBF6BB182FEB}"/>
-          </ac:cxnSpMkLst>
-        </pc:cxnChg>
       </pc:sldChg>
       <pc:sldChg chg="addSp modSp new mod">
         <pc:chgData name="Jonathan Bollig" userId="8b5d0afe-f106-45e0-8c3f-fd98fa124db1" providerId="ADAL" clId="{B2469FA9-EBD8-4834-A16D-CBF8EFC907DD}" dt="2025-10-04T13:49:41.470" v="1124" actId="13926"/>
@@ -764,6 +607,99 @@
       </pc:sldChg>
     </pc:docChg>
   </pc:docChgLst>
+  <pc:docChgLst>
+    <pc:chgData name="Jonathan Bollig" userId="8b5d0afe-f106-45e0-8c3f-fd98fa124db1" providerId="ADAL" clId="{891409C9-2319-433B-8001-2E1CE368518E}"/>
+    <pc:docChg chg="custSel addSld delSld modSld">
+      <pc:chgData name="Jonathan Bollig" userId="8b5d0afe-f106-45e0-8c3f-fd98fa124db1" providerId="ADAL" clId="{891409C9-2319-433B-8001-2E1CE368518E}" dt="2025-08-18T13:33:56.347" v="46" actId="47"/>
+      <pc:docMkLst>
+        <pc:docMk/>
+      </pc:docMkLst>
+      <pc:sldChg chg="modSp mod">
+        <pc:chgData name="Jonathan Bollig" userId="8b5d0afe-f106-45e0-8c3f-fd98fa124db1" providerId="ADAL" clId="{891409C9-2319-433B-8001-2E1CE368518E}" dt="2025-08-18T10:03:07.320" v="7" actId="20577"/>
+        <pc:sldMkLst>
+          <pc:docMk/>
+          <pc:sldMk cId="836289018" sldId="256"/>
+        </pc:sldMkLst>
+      </pc:sldChg>
+      <pc:sldChg chg="del">
+        <pc:chgData name="Jonathan Bollig" userId="8b5d0afe-f106-45e0-8c3f-fd98fa124db1" providerId="ADAL" clId="{891409C9-2319-433B-8001-2E1CE368518E}" dt="2025-08-18T09:57:07.527" v="0" actId="47"/>
+        <pc:sldMkLst>
+          <pc:docMk/>
+          <pc:sldMk cId="3656329933" sldId="257"/>
+        </pc:sldMkLst>
+      </pc:sldChg>
+      <pc:sldChg chg="del">
+        <pc:chgData name="Jonathan Bollig" userId="8b5d0afe-f106-45e0-8c3f-fd98fa124db1" providerId="ADAL" clId="{891409C9-2319-433B-8001-2E1CE368518E}" dt="2025-08-18T09:57:07.527" v="0" actId="47"/>
+        <pc:sldMkLst>
+          <pc:docMk/>
+          <pc:sldMk cId="544279955" sldId="258"/>
+        </pc:sldMkLst>
+      </pc:sldChg>
+      <pc:sldChg chg="delSp modSp del mod">
+        <pc:chgData name="Jonathan Bollig" userId="8b5d0afe-f106-45e0-8c3f-fd98fa124db1" providerId="ADAL" clId="{891409C9-2319-433B-8001-2E1CE368518E}" dt="2025-08-18T13:33:56.347" v="46" actId="47"/>
+        <pc:sldMkLst>
+          <pc:docMk/>
+          <pc:sldMk cId="2169503629" sldId="259"/>
+        </pc:sldMkLst>
+      </pc:sldChg>
+      <pc:sldChg chg="add">
+        <pc:chgData name="Jonathan Bollig" userId="8b5d0afe-f106-45e0-8c3f-fd98fa124db1" providerId="ADAL" clId="{891409C9-2319-433B-8001-2E1CE368518E}" dt="2025-08-18T13:33:54.473" v="45"/>
+        <pc:sldMkLst>
+          <pc:docMk/>
+          <pc:sldMk cId="932306145" sldId="260"/>
+        </pc:sldMkLst>
+      </pc:sldChg>
+      <pc:sldChg chg="del">
+        <pc:chgData name="Jonathan Bollig" userId="8b5d0afe-f106-45e0-8c3f-fd98fa124db1" providerId="ADAL" clId="{891409C9-2319-433B-8001-2E1CE368518E}" dt="2025-08-18T09:57:07.527" v="0" actId="47"/>
+        <pc:sldMkLst>
+          <pc:docMk/>
+          <pc:sldMk cId="2533283895" sldId="260"/>
+        </pc:sldMkLst>
+      </pc:sldChg>
+      <pc:sldChg chg="del">
+        <pc:chgData name="Jonathan Bollig" userId="8b5d0afe-f106-45e0-8c3f-fd98fa124db1" providerId="ADAL" clId="{891409C9-2319-433B-8001-2E1CE368518E}" dt="2025-08-18T09:57:07.527" v="0" actId="47"/>
+        <pc:sldMkLst>
+          <pc:docMk/>
+          <pc:sldMk cId="847849653" sldId="261"/>
+        </pc:sldMkLst>
+      </pc:sldChg>
+      <pc:sldChg chg="del">
+        <pc:chgData name="Jonathan Bollig" userId="8b5d0afe-f106-45e0-8c3f-fd98fa124db1" providerId="ADAL" clId="{891409C9-2319-433B-8001-2E1CE368518E}" dt="2025-08-18T09:57:07.527" v="0" actId="47"/>
+        <pc:sldMkLst>
+          <pc:docMk/>
+          <pc:sldMk cId="1908144578" sldId="262"/>
+        </pc:sldMkLst>
+      </pc:sldChg>
+      <pc:sldChg chg="del">
+        <pc:chgData name="Jonathan Bollig" userId="8b5d0afe-f106-45e0-8c3f-fd98fa124db1" providerId="ADAL" clId="{891409C9-2319-433B-8001-2E1CE368518E}" dt="2025-08-18T09:57:07.527" v="0" actId="47"/>
+        <pc:sldMkLst>
+          <pc:docMk/>
+          <pc:sldMk cId="4076698392" sldId="263"/>
+        </pc:sldMkLst>
+      </pc:sldChg>
+      <pc:sldChg chg="del">
+        <pc:chgData name="Jonathan Bollig" userId="8b5d0afe-f106-45e0-8c3f-fd98fa124db1" providerId="ADAL" clId="{891409C9-2319-433B-8001-2E1CE368518E}" dt="2025-08-18T09:57:07.527" v="0" actId="47"/>
+        <pc:sldMkLst>
+          <pc:docMk/>
+          <pc:sldMk cId="3708449378" sldId="264"/>
+        </pc:sldMkLst>
+      </pc:sldChg>
+      <pc:sldChg chg="del">
+        <pc:chgData name="Jonathan Bollig" userId="8b5d0afe-f106-45e0-8c3f-fd98fa124db1" providerId="ADAL" clId="{891409C9-2319-433B-8001-2E1CE368518E}" dt="2025-08-18T09:57:07.527" v="0" actId="47"/>
+        <pc:sldMkLst>
+          <pc:docMk/>
+          <pc:sldMk cId="933916611" sldId="265"/>
+        </pc:sldMkLst>
+      </pc:sldChg>
+      <pc:sldChg chg="del">
+        <pc:chgData name="Jonathan Bollig" userId="8b5d0afe-f106-45e0-8c3f-fd98fa124db1" providerId="ADAL" clId="{891409C9-2319-433B-8001-2E1CE368518E}" dt="2025-08-18T09:57:07.527" v="0" actId="47"/>
+        <pc:sldMkLst>
+          <pc:docMk/>
+          <pc:sldMk cId="2117799034" sldId="266"/>
+        </pc:sldMkLst>
+      </pc:sldChg>
+    </pc:docChg>
+  </pc:docChgLst>
 </pc:chgInfo>
 </file>
 
@@ -849,7 +785,7 @@
           <a:p>
             <a:fld id="{0B6CA2EE-5589-4682-AD7F-744DBF1E81F5}" type="datetimeFigureOut">
               <a:rPr lang="de-DE" smtClean="0"/>
-              <a:t>06.10.2025</a:t>
+              <a:t>07.10.2025</a:t>
             </a:fld>
             <a:endParaRPr lang="de-DE"/>
           </a:p>
@@ -1521,7 +1457,7 @@
           <a:p>
             <a:fld id="{ADA51F25-4808-47F4-BF6E-BCDC230DB01C}" type="datetimeFigureOut">
               <a:rPr lang="de-DE" smtClean="0"/>
-              <a:t>06.10.2025</a:t>
+              <a:t>07.10.2025</a:t>
             </a:fld>
             <a:endParaRPr lang="de-DE"/>
           </a:p>
@@ -1719,7 +1655,7 @@
           <a:p>
             <a:fld id="{ADA51F25-4808-47F4-BF6E-BCDC230DB01C}" type="datetimeFigureOut">
               <a:rPr lang="de-DE" smtClean="0"/>
-              <a:t>06.10.2025</a:t>
+              <a:t>07.10.2025</a:t>
             </a:fld>
             <a:endParaRPr lang="de-DE"/>
           </a:p>
@@ -1927,7 +1863,7 @@
           <a:p>
             <a:fld id="{ADA51F25-4808-47F4-BF6E-BCDC230DB01C}" type="datetimeFigureOut">
               <a:rPr lang="de-DE" smtClean="0"/>
-              <a:t>06.10.2025</a:t>
+              <a:t>07.10.2025</a:t>
             </a:fld>
             <a:endParaRPr lang="de-DE"/>
           </a:p>
@@ -2125,7 +2061,7 @@
           <a:p>
             <a:fld id="{ADA51F25-4808-47F4-BF6E-BCDC230DB01C}" type="datetimeFigureOut">
               <a:rPr lang="de-DE" smtClean="0"/>
-              <a:t>06.10.2025</a:t>
+              <a:t>07.10.2025</a:t>
             </a:fld>
             <a:endParaRPr lang="de-DE"/>
           </a:p>
@@ -2400,7 +2336,7 @@
           <a:p>
             <a:fld id="{ADA51F25-4808-47F4-BF6E-BCDC230DB01C}" type="datetimeFigureOut">
               <a:rPr lang="de-DE" smtClean="0"/>
-              <a:t>06.10.2025</a:t>
+              <a:t>07.10.2025</a:t>
             </a:fld>
             <a:endParaRPr lang="de-DE"/>
           </a:p>
@@ -2665,7 +2601,7 @@
           <a:p>
             <a:fld id="{ADA51F25-4808-47F4-BF6E-BCDC230DB01C}" type="datetimeFigureOut">
               <a:rPr lang="de-DE" smtClean="0"/>
-              <a:t>06.10.2025</a:t>
+              <a:t>07.10.2025</a:t>
             </a:fld>
             <a:endParaRPr lang="de-DE"/>
           </a:p>
@@ -3077,7 +3013,7 @@
           <a:p>
             <a:fld id="{ADA51F25-4808-47F4-BF6E-BCDC230DB01C}" type="datetimeFigureOut">
               <a:rPr lang="de-DE" smtClean="0"/>
-              <a:t>06.10.2025</a:t>
+              <a:t>07.10.2025</a:t>
             </a:fld>
             <a:endParaRPr lang="de-DE"/>
           </a:p>
@@ -3218,7 +3154,7 @@
           <a:p>
             <a:fld id="{ADA51F25-4808-47F4-BF6E-BCDC230DB01C}" type="datetimeFigureOut">
               <a:rPr lang="de-DE" smtClean="0"/>
-              <a:t>06.10.2025</a:t>
+              <a:t>07.10.2025</a:t>
             </a:fld>
             <a:endParaRPr lang="de-DE"/>
           </a:p>
@@ -3331,7 +3267,7 @@
           <a:p>
             <a:fld id="{ADA51F25-4808-47F4-BF6E-BCDC230DB01C}" type="datetimeFigureOut">
               <a:rPr lang="de-DE" smtClean="0"/>
-              <a:t>06.10.2025</a:t>
+              <a:t>07.10.2025</a:t>
             </a:fld>
             <a:endParaRPr lang="de-DE"/>
           </a:p>
@@ -3642,7 +3578,7 @@
           <a:p>
             <a:fld id="{ADA51F25-4808-47F4-BF6E-BCDC230DB01C}" type="datetimeFigureOut">
               <a:rPr lang="de-DE" smtClean="0"/>
-              <a:t>06.10.2025</a:t>
+              <a:t>07.10.2025</a:t>
             </a:fld>
             <a:endParaRPr lang="de-DE"/>
           </a:p>
@@ -3930,7 +3866,7 @@
           <a:p>
             <a:fld id="{ADA51F25-4808-47F4-BF6E-BCDC230DB01C}" type="datetimeFigureOut">
               <a:rPr lang="de-DE" smtClean="0"/>
-              <a:t>06.10.2025</a:t>
+              <a:t>07.10.2025</a:t>
             </a:fld>
             <a:endParaRPr lang="de-DE"/>
           </a:p>
@@ -4171,7 +4107,7 @@
           <a:p>
             <a:fld id="{ADA51F25-4808-47F4-BF6E-BCDC230DB01C}" type="datetimeFigureOut">
               <a:rPr lang="de-DE" smtClean="0"/>
-              <a:t>06.10.2025</a:t>
+              <a:t>07.10.2025</a:t>
             </a:fld>
             <a:endParaRPr lang="de-DE"/>
           </a:p>
@@ -4664,9 +4600,10 @@
           </a:p>
           <a:p>
             <a:r>
-              <a:rPr lang="en-US" noProof="0" dirty="0"/>
-              <a:t>08.10.2025</a:t>
-            </a:r>
+              <a:rPr lang="en-US" noProof="0"/>
+              <a:t>09.10.2025</a:t>
+            </a:r>
+            <a:endParaRPr lang="en-US" noProof="0" dirty="0"/>
           </a:p>
         </p:txBody>
       </p:sp>

--- a/Lectures/Chunk 7 - Imports.pptx
+++ b/Lectures/Chunk 7 - Imports.pptx
@@ -221,7 +221,7 @@
   <pc:docChgLst>
     <pc:chgData name="Jonathan Bollig" userId="8b5d0afe-f106-45e0-8c3f-fd98fa124db1" providerId="ADAL" clId="{B2469FA9-EBD8-4834-A16D-CBF8EFC907DD}"/>
     <pc:docChg chg="undo custSel addSld delSld modSld">
-      <pc:chgData name="Jonathan Bollig" userId="8b5d0afe-f106-45e0-8c3f-fd98fa124db1" providerId="ADAL" clId="{B2469FA9-EBD8-4834-A16D-CBF8EFC907DD}" dt="2025-10-07T00:02:32.428" v="1652" actId="20577"/>
+      <pc:chgData name="Jonathan Bollig" userId="8b5d0afe-f106-45e0-8c3f-fd98fa124db1" providerId="ADAL" clId="{B2469FA9-EBD8-4834-A16D-CBF8EFC907DD}" dt="2025-10-07T15:30:08.737" v="1688" actId="1076"/>
       <pc:docMkLst>
         <pc:docMk/>
       </pc:docMkLst>
@@ -308,13 +308,13 @@
         </pc:sldMkLst>
       </pc:sldChg>
       <pc:sldChg chg="addSp modSp new mod">
-        <pc:chgData name="Jonathan Bollig" userId="8b5d0afe-f106-45e0-8c3f-fd98fa124db1" providerId="ADAL" clId="{B2469FA9-EBD8-4834-A16D-CBF8EFC907DD}" dt="2025-10-04T11:29:45.374" v="279" actId="1076"/>
+        <pc:chgData name="Jonathan Bollig" userId="8b5d0afe-f106-45e0-8c3f-fd98fa124db1" providerId="ADAL" clId="{B2469FA9-EBD8-4834-A16D-CBF8EFC907DD}" dt="2025-10-07T15:29:56.176" v="1674" actId="20577"/>
         <pc:sldMkLst>
           <pc:docMk/>
           <pc:sldMk cId="1660626831" sldId="270"/>
         </pc:sldMkLst>
         <pc:spChg chg="mod">
-          <ac:chgData name="Jonathan Bollig" userId="8b5d0afe-f106-45e0-8c3f-fd98fa124db1" providerId="ADAL" clId="{B2469FA9-EBD8-4834-A16D-CBF8EFC907DD}" dt="2025-10-04T11:09:03.295" v="74" actId="20577"/>
+          <ac:chgData name="Jonathan Bollig" userId="8b5d0afe-f106-45e0-8c3f-fd98fa124db1" providerId="ADAL" clId="{B2469FA9-EBD8-4834-A16D-CBF8EFC907DD}" dt="2025-10-07T15:29:56.176" v="1674" actId="20577"/>
           <ac:spMkLst>
             <pc:docMk/>
             <pc:sldMk cId="1660626831" sldId="270"/>
@@ -347,13 +347,13 @@
         </pc:picChg>
       </pc:sldChg>
       <pc:sldChg chg="addSp delSp modSp new mod">
-        <pc:chgData name="Jonathan Bollig" userId="8b5d0afe-f106-45e0-8c3f-fd98fa124db1" providerId="ADAL" clId="{B2469FA9-EBD8-4834-A16D-CBF8EFC907DD}" dt="2025-10-04T11:44:48.095" v="458" actId="1440"/>
+        <pc:chgData name="Jonathan Bollig" userId="8b5d0afe-f106-45e0-8c3f-fd98fa124db1" providerId="ADAL" clId="{B2469FA9-EBD8-4834-A16D-CBF8EFC907DD}" dt="2025-10-07T15:30:08.737" v="1688" actId="1076"/>
         <pc:sldMkLst>
           <pc:docMk/>
           <pc:sldMk cId="1004629392" sldId="271"/>
         </pc:sldMkLst>
         <pc:spChg chg="mod">
-          <ac:chgData name="Jonathan Bollig" userId="8b5d0afe-f106-45e0-8c3f-fd98fa124db1" providerId="ADAL" clId="{B2469FA9-EBD8-4834-A16D-CBF8EFC907DD}" dt="2025-10-04T11:32:10.886" v="293" actId="20577"/>
+          <ac:chgData name="Jonathan Bollig" userId="8b5d0afe-f106-45e0-8c3f-fd98fa124db1" providerId="ADAL" clId="{B2469FA9-EBD8-4834-A16D-CBF8EFC907DD}" dt="2025-10-07T15:30:05.044" v="1687" actId="20577"/>
           <ac:spMkLst>
             <pc:docMk/>
             <pc:sldMk cId="1004629392" sldId="271"/>
@@ -369,7 +369,7 @@
           </ac:spMkLst>
         </pc:spChg>
         <pc:picChg chg="add mod">
-          <ac:chgData name="Jonathan Bollig" userId="8b5d0afe-f106-45e0-8c3f-fd98fa124db1" providerId="ADAL" clId="{B2469FA9-EBD8-4834-A16D-CBF8EFC907DD}" dt="2025-10-04T11:42:56.586" v="454" actId="1076"/>
+          <ac:chgData name="Jonathan Bollig" userId="8b5d0afe-f106-45e0-8c3f-fd98fa124db1" providerId="ADAL" clId="{B2469FA9-EBD8-4834-A16D-CBF8EFC907DD}" dt="2025-10-07T15:30:08.737" v="1688" actId="1076"/>
           <ac:picMkLst>
             <pc:docMk/>
             <pc:sldMk cId="1004629392" sldId="271"/>
@@ -4660,7 +4660,7 @@
           <a:p>
             <a:r>
               <a:rPr lang="en-US" dirty="0"/>
-              <a:t>Being Lazy: Let Others Code</a:t>
+              <a:t>Live Coding: Being Lazy - Let Others Code</a:t>
             </a:r>
             <a:endParaRPr lang="de-DE" dirty="0"/>
           </a:p>
@@ -4918,7 +4918,7 @@
           <a:p>
             <a:r>
               <a:rPr lang="en-US" dirty="0"/>
-              <a:t>More options:</a:t>
+              <a:t>Live Coding: More options:</a:t>
             </a:r>
             <a:endParaRPr lang="de-DE" dirty="0"/>
           </a:p>
@@ -5013,7 +5013,7 @@
         </p:blipFill>
         <p:spPr>
           <a:xfrm>
-            <a:off x="5585672" y="746089"/>
+            <a:off x="7193755" y="676368"/>
             <a:ext cx="3302296" cy="2093692"/>
           </a:xfrm>
           <a:prstGeom prst="rect">
